--- a/Slides/jQuery/16- Events in jQuery.pptx
+++ b/Slides/jQuery/16- Events in jQuery.pptx
@@ -249,7 +249,7 @@
             <a:fld id="{86D088FE-3E68-47FE-8BA4-634CD34BABBC}" type="datetimeFigureOut">
               <a:rPr lang="en-GB" smtClean="0"/>
               <a:pPr/>
-              <a:t>13/02/2025</a:t>
+              <a:t>21/05/2026</a:t>
             </a:fld>
             <a:endParaRPr lang="en-GB"/>
           </a:p>
@@ -421,7 +421,7 @@
             <a:fld id="{1D6B66C6-1E92-0F4E-A300-9D4ED1F0C23F}" type="datetimeFigureOut">
               <a:rPr lang="en-GB" smtClean="0"/>
               <a:pPr/>
-              <a:t>13/02/2025</a:t>
+              <a:t>21/05/2026</a:t>
             </a:fld>
             <a:endParaRPr lang="en-GB"/>
           </a:p>
@@ -2006,7 +2006,781 @@
           <a:bodyPr/>
           <a:lstStyle/>
           <a:p>
-            <a:endParaRPr lang="en-IN"/>
+            <a:r>
+              <a:rPr lang="en-GB" sz="1200" kern="1200" dirty="0">
+                <a:solidFill>
+                  <a:schemeClr val="tx1"/>
+                </a:solidFill>
+                <a:latin typeface="Montserrat" panose="00000500000000000000" pitchFamily="2" charset="0"/>
+                <a:ea typeface="+mn-ea"/>
+                <a:cs typeface="+mn-cs"/>
+              </a:rPr>
+              <a:t>&lt;html&gt;</a:t>
+            </a:r>
+          </a:p>
+          <a:p>
+            <a:r>
+              <a:rPr lang="en-GB" sz="1200" kern="1200" dirty="0">
+                <a:solidFill>
+                  <a:schemeClr val="tx1"/>
+                </a:solidFill>
+                <a:latin typeface="Montserrat" panose="00000500000000000000" pitchFamily="2" charset="0"/>
+                <a:ea typeface="+mn-ea"/>
+                <a:cs typeface="+mn-cs"/>
+              </a:rPr>
+              <a:t>&lt;head&gt;</a:t>
+            </a:r>
+          </a:p>
+          <a:p>
+            <a:r>
+              <a:rPr lang="en-GB" sz="1200" kern="1200" dirty="0">
+                <a:solidFill>
+                  <a:schemeClr val="tx1"/>
+                </a:solidFill>
+                <a:latin typeface="Montserrat" panose="00000500000000000000" pitchFamily="2" charset="0"/>
+                <a:ea typeface="+mn-ea"/>
+                <a:cs typeface="+mn-cs"/>
+              </a:rPr>
+              <a:t>    &lt;script src="https://code.jquery.com/jquery-3.7.1.min.js"&gt;&lt;/script&gt;</a:t>
+            </a:r>
+          </a:p>
+          <a:p>
+            <a:r>
+              <a:rPr lang="en-GB" sz="1200" kern="1200" dirty="0">
+                <a:solidFill>
+                  <a:schemeClr val="tx1"/>
+                </a:solidFill>
+                <a:latin typeface="Montserrat" panose="00000500000000000000" pitchFamily="2" charset="0"/>
+                <a:ea typeface="+mn-ea"/>
+                <a:cs typeface="+mn-cs"/>
+              </a:rPr>
+              <a:t>    &lt;script&gt;</a:t>
+            </a:r>
+          </a:p>
+          <a:p>
+            <a:r>
+              <a:rPr lang="en-GB" sz="1200" kern="1200" dirty="0">
+                <a:solidFill>
+                  <a:schemeClr val="tx1"/>
+                </a:solidFill>
+                <a:latin typeface="Montserrat" panose="00000500000000000000" pitchFamily="2" charset="0"/>
+                <a:ea typeface="+mn-ea"/>
+                <a:cs typeface="+mn-cs"/>
+              </a:rPr>
+              <a:t>        $(function () {</a:t>
+            </a:r>
+          </a:p>
+          <a:p>
+            <a:r>
+              <a:rPr lang="en-GB" sz="1200" kern="1200" dirty="0">
+                <a:solidFill>
+                  <a:schemeClr val="tx1"/>
+                </a:solidFill>
+                <a:latin typeface="Montserrat" panose="00000500000000000000" pitchFamily="2" charset="0"/>
+                <a:ea typeface="+mn-ea"/>
+                <a:cs typeface="+mn-cs"/>
+              </a:rPr>
+              <a:t>            $('#</a:t>
+            </a:r>
+            <a:r>
+              <a:rPr lang="en-GB" sz="1200" kern="1200" dirty="0" err="1">
+                <a:solidFill>
+                  <a:schemeClr val="tx1"/>
+                </a:solidFill>
+                <a:latin typeface="Montserrat" panose="00000500000000000000" pitchFamily="2" charset="0"/>
+                <a:ea typeface="+mn-ea"/>
+                <a:cs typeface="+mn-cs"/>
+              </a:rPr>
+              <a:t>UKimage</a:t>
+            </a:r>
+            <a:r>
+              <a:rPr lang="en-GB" sz="1200" kern="1200" dirty="0">
+                <a:solidFill>
+                  <a:schemeClr val="tx1"/>
+                </a:solidFill>
+                <a:latin typeface="Montserrat" panose="00000500000000000000" pitchFamily="2" charset="0"/>
+                <a:ea typeface="+mn-ea"/>
+                <a:cs typeface="+mn-cs"/>
+              </a:rPr>
+              <a:t>').</a:t>
+            </a:r>
+            <a:r>
+              <a:rPr lang="en-GB" sz="1200" kern="1200" dirty="0" err="1">
+                <a:solidFill>
+                  <a:schemeClr val="tx1"/>
+                </a:solidFill>
+                <a:latin typeface="Montserrat" panose="00000500000000000000" pitchFamily="2" charset="0"/>
+                <a:ea typeface="+mn-ea"/>
+                <a:cs typeface="+mn-cs"/>
+              </a:rPr>
+              <a:t>mousemove</a:t>
+            </a:r>
+            <a:r>
+              <a:rPr lang="en-GB" sz="1200" kern="1200" dirty="0">
+                <a:solidFill>
+                  <a:schemeClr val="tx1"/>
+                </a:solidFill>
+                <a:latin typeface="Montserrat" panose="00000500000000000000" pitchFamily="2" charset="0"/>
+                <a:ea typeface="+mn-ea"/>
+                <a:cs typeface="+mn-cs"/>
+              </a:rPr>
+              <a:t>(function (e) {</a:t>
+            </a:r>
+          </a:p>
+          <a:p>
+            <a:r>
+              <a:rPr lang="en-GB" sz="1200" kern="1200" dirty="0">
+                <a:solidFill>
+                  <a:schemeClr val="tx1"/>
+                </a:solidFill>
+                <a:latin typeface="Montserrat" panose="00000500000000000000" pitchFamily="2" charset="0"/>
+                <a:ea typeface="+mn-ea"/>
+                <a:cs typeface="+mn-cs"/>
+              </a:rPr>
+              <a:t>                var X = </a:t>
+            </a:r>
+            <a:r>
+              <a:rPr lang="en-GB" sz="1200" kern="1200" dirty="0" err="1">
+                <a:solidFill>
+                  <a:schemeClr val="tx1"/>
+                </a:solidFill>
+                <a:latin typeface="Montserrat" panose="00000500000000000000" pitchFamily="2" charset="0"/>
+                <a:ea typeface="+mn-ea"/>
+                <a:cs typeface="+mn-cs"/>
+              </a:rPr>
+              <a:t>e.pageX</a:t>
+            </a:r>
+            <a:r>
+              <a:rPr lang="en-GB" sz="1200" kern="1200" dirty="0">
+                <a:solidFill>
+                  <a:schemeClr val="tx1"/>
+                </a:solidFill>
+                <a:latin typeface="Montserrat" panose="00000500000000000000" pitchFamily="2" charset="0"/>
+                <a:ea typeface="+mn-ea"/>
+                <a:cs typeface="+mn-cs"/>
+              </a:rPr>
+              <a:t> - $(this).offset().left;</a:t>
+            </a:r>
+          </a:p>
+          <a:p>
+            <a:r>
+              <a:rPr lang="en-GB" sz="1200" kern="1200" dirty="0">
+                <a:solidFill>
+                  <a:schemeClr val="tx1"/>
+                </a:solidFill>
+                <a:latin typeface="Montserrat" panose="00000500000000000000" pitchFamily="2" charset="0"/>
+                <a:ea typeface="+mn-ea"/>
+                <a:cs typeface="+mn-cs"/>
+              </a:rPr>
+              <a:t>                var Y = </a:t>
+            </a:r>
+            <a:r>
+              <a:rPr lang="en-GB" sz="1200" kern="1200" dirty="0" err="1">
+                <a:solidFill>
+                  <a:schemeClr val="tx1"/>
+                </a:solidFill>
+                <a:latin typeface="Montserrat" panose="00000500000000000000" pitchFamily="2" charset="0"/>
+                <a:ea typeface="+mn-ea"/>
+                <a:cs typeface="+mn-cs"/>
+              </a:rPr>
+              <a:t>e.pageY</a:t>
+            </a:r>
+            <a:r>
+              <a:rPr lang="en-GB" sz="1200" kern="1200" dirty="0">
+                <a:solidFill>
+                  <a:schemeClr val="tx1"/>
+                </a:solidFill>
+                <a:latin typeface="Montserrat" panose="00000500000000000000" pitchFamily="2" charset="0"/>
+                <a:ea typeface="+mn-ea"/>
+                <a:cs typeface="+mn-cs"/>
+              </a:rPr>
+              <a:t> - $(this).offset().top;</a:t>
+            </a:r>
+          </a:p>
+          <a:p>
+            <a:endParaRPr lang="en-GB" sz="1200" kern="1200" dirty="0">
+              <a:solidFill>
+                <a:schemeClr val="tx1"/>
+              </a:solidFill>
+              <a:latin typeface="Montserrat" panose="00000500000000000000" pitchFamily="2" charset="0"/>
+              <a:ea typeface="+mn-ea"/>
+              <a:cs typeface="+mn-cs"/>
+            </a:endParaRPr>
+          </a:p>
+          <a:p>
+            <a:r>
+              <a:rPr lang="en-GB" sz="1200" kern="1200" dirty="0">
+                <a:solidFill>
+                  <a:schemeClr val="tx1"/>
+                </a:solidFill>
+                <a:latin typeface="Montserrat" panose="00000500000000000000" pitchFamily="2" charset="0"/>
+                <a:ea typeface="+mn-ea"/>
+                <a:cs typeface="+mn-cs"/>
+              </a:rPr>
+              <a:t>                $('#div1')</a:t>
+            </a:r>
+          </a:p>
+          <a:p>
+            <a:r>
+              <a:rPr lang="en-GB" sz="1200" kern="1200" dirty="0">
+                <a:solidFill>
+                  <a:schemeClr val="tx1"/>
+                </a:solidFill>
+                <a:latin typeface="Montserrat" panose="00000500000000000000" pitchFamily="2" charset="0"/>
+                <a:ea typeface="+mn-ea"/>
+                <a:cs typeface="+mn-cs"/>
+              </a:rPr>
+              <a:t>                    .text(X + " , " + Y)</a:t>
+            </a:r>
+          </a:p>
+          <a:p>
+            <a:r>
+              <a:rPr lang="en-GB" sz="1200" kern="1200" dirty="0">
+                <a:solidFill>
+                  <a:schemeClr val="tx1"/>
+                </a:solidFill>
+                <a:latin typeface="Montserrat" panose="00000500000000000000" pitchFamily="2" charset="0"/>
+                <a:ea typeface="+mn-ea"/>
+                <a:cs typeface="+mn-cs"/>
+              </a:rPr>
+              <a:t>                    .</a:t>
+            </a:r>
+            <a:r>
+              <a:rPr lang="en-GB" sz="1200" kern="1200" dirty="0" err="1">
+                <a:solidFill>
+                  <a:schemeClr val="tx1"/>
+                </a:solidFill>
+                <a:latin typeface="Montserrat" panose="00000500000000000000" pitchFamily="2" charset="0"/>
+                <a:ea typeface="+mn-ea"/>
+                <a:cs typeface="+mn-cs"/>
+              </a:rPr>
+              <a:t>css</a:t>
+            </a:r>
+            <a:r>
+              <a:rPr lang="en-GB" sz="1200" kern="1200" dirty="0">
+                <a:solidFill>
+                  <a:schemeClr val="tx1"/>
+                </a:solidFill>
+                <a:latin typeface="Montserrat" panose="00000500000000000000" pitchFamily="2" charset="0"/>
+                <a:ea typeface="+mn-ea"/>
+                <a:cs typeface="+mn-cs"/>
+              </a:rPr>
+              <a:t>({</a:t>
+            </a:r>
+          </a:p>
+          <a:p>
+            <a:r>
+              <a:rPr lang="en-GB" sz="1200" kern="1200" dirty="0">
+                <a:solidFill>
+                  <a:schemeClr val="tx1"/>
+                </a:solidFill>
+                <a:latin typeface="Montserrat" panose="00000500000000000000" pitchFamily="2" charset="0"/>
+                <a:ea typeface="+mn-ea"/>
+                <a:cs typeface="+mn-cs"/>
+              </a:rPr>
+              <a:t>                        left: (</a:t>
+            </a:r>
+            <a:r>
+              <a:rPr lang="en-GB" sz="1200" kern="1200" dirty="0" err="1">
+                <a:solidFill>
+                  <a:schemeClr val="tx1"/>
+                </a:solidFill>
+                <a:latin typeface="Montserrat" panose="00000500000000000000" pitchFamily="2" charset="0"/>
+                <a:ea typeface="+mn-ea"/>
+                <a:cs typeface="+mn-cs"/>
+              </a:rPr>
+              <a:t>e.pageX</a:t>
+            </a:r>
+            <a:r>
+              <a:rPr lang="en-GB" sz="1200" kern="1200" dirty="0">
+                <a:solidFill>
+                  <a:schemeClr val="tx1"/>
+                </a:solidFill>
+                <a:latin typeface="Montserrat" panose="00000500000000000000" pitchFamily="2" charset="0"/>
+                <a:ea typeface="+mn-ea"/>
+                <a:cs typeface="+mn-cs"/>
+              </a:rPr>
+              <a:t> +10)+ "</a:t>
+            </a:r>
+            <a:r>
+              <a:rPr lang="en-GB" sz="1200" kern="1200" dirty="0" err="1">
+                <a:solidFill>
+                  <a:schemeClr val="tx1"/>
+                </a:solidFill>
+                <a:latin typeface="Montserrat" panose="00000500000000000000" pitchFamily="2" charset="0"/>
+                <a:ea typeface="+mn-ea"/>
+                <a:cs typeface="+mn-cs"/>
+              </a:rPr>
+              <a:t>px</a:t>
+            </a:r>
+            <a:r>
+              <a:rPr lang="en-GB" sz="1200" kern="1200" dirty="0">
+                <a:solidFill>
+                  <a:schemeClr val="tx1"/>
+                </a:solidFill>
+                <a:latin typeface="Montserrat" panose="00000500000000000000" pitchFamily="2" charset="0"/>
+                <a:ea typeface="+mn-ea"/>
+                <a:cs typeface="+mn-cs"/>
+              </a:rPr>
+              <a:t>",</a:t>
+            </a:r>
+          </a:p>
+          <a:p>
+            <a:r>
+              <a:rPr lang="en-GB" sz="1200" kern="1200" dirty="0">
+                <a:solidFill>
+                  <a:schemeClr val="tx1"/>
+                </a:solidFill>
+                <a:latin typeface="Montserrat" panose="00000500000000000000" pitchFamily="2" charset="0"/>
+                <a:ea typeface="+mn-ea"/>
+                <a:cs typeface="+mn-cs"/>
+              </a:rPr>
+              <a:t>                        top: (e.pageY+10) + "</a:t>
+            </a:r>
+            <a:r>
+              <a:rPr lang="en-GB" sz="1200" kern="1200" dirty="0" err="1">
+                <a:solidFill>
+                  <a:schemeClr val="tx1"/>
+                </a:solidFill>
+                <a:latin typeface="Montserrat" panose="00000500000000000000" pitchFamily="2" charset="0"/>
+                <a:ea typeface="+mn-ea"/>
+                <a:cs typeface="+mn-cs"/>
+              </a:rPr>
+              <a:t>px</a:t>
+            </a:r>
+            <a:r>
+              <a:rPr lang="en-GB" sz="1200" kern="1200" dirty="0">
+                <a:solidFill>
+                  <a:schemeClr val="tx1"/>
+                </a:solidFill>
+                <a:latin typeface="Montserrat" panose="00000500000000000000" pitchFamily="2" charset="0"/>
+                <a:ea typeface="+mn-ea"/>
+                <a:cs typeface="+mn-cs"/>
+              </a:rPr>
+              <a:t>"</a:t>
+            </a:r>
+          </a:p>
+          <a:p>
+            <a:r>
+              <a:rPr lang="en-GB" sz="1200" kern="1200" dirty="0">
+                <a:solidFill>
+                  <a:schemeClr val="tx1"/>
+                </a:solidFill>
+                <a:latin typeface="Montserrat" panose="00000500000000000000" pitchFamily="2" charset="0"/>
+                <a:ea typeface="+mn-ea"/>
+                <a:cs typeface="+mn-cs"/>
+              </a:rPr>
+              <a:t>                    });</a:t>
+            </a:r>
+          </a:p>
+          <a:p>
+            <a:r>
+              <a:rPr lang="en-GB" sz="1200" kern="1200" dirty="0">
+                <a:solidFill>
+                  <a:schemeClr val="tx1"/>
+                </a:solidFill>
+                <a:latin typeface="Montserrat" panose="00000500000000000000" pitchFamily="2" charset="0"/>
+                <a:ea typeface="+mn-ea"/>
+                <a:cs typeface="+mn-cs"/>
+              </a:rPr>
+              <a:t>            });</a:t>
+            </a:r>
+          </a:p>
+          <a:p>
+            <a:r>
+              <a:rPr lang="en-GB" sz="1200" kern="1200" dirty="0">
+                <a:solidFill>
+                  <a:schemeClr val="tx1"/>
+                </a:solidFill>
+                <a:latin typeface="Montserrat" panose="00000500000000000000" pitchFamily="2" charset="0"/>
+                <a:ea typeface="+mn-ea"/>
+                <a:cs typeface="+mn-cs"/>
+              </a:rPr>
+              <a:t>        });</a:t>
+            </a:r>
+          </a:p>
+          <a:p>
+            <a:r>
+              <a:rPr lang="en-GB" sz="1200" kern="1200" dirty="0">
+                <a:solidFill>
+                  <a:schemeClr val="tx1"/>
+                </a:solidFill>
+                <a:latin typeface="Montserrat" panose="00000500000000000000" pitchFamily="2" charset="0"/>
+                <a:ea typeface="+mn-ea"/>
+                <a:cs typeface="+mn-cs"/>
+              </a:rPr>
+              <a:t>    &lt;/script&gt;</a:t>
+            </a:r>
+          </a:p>
+          <a:p>
+            <a:r>
+              <a:rPr lang="en-GB" sz="1200" kern="1200" dirty="0">
+                <a:solidFill>
+                  <a:schemeClr val="tx1"/>
+                </a:solidFill>
+                <a:latin typeface="Montserrat" panose="00000500000000000000" pitchFamily="2" charset="0"/>
+                <a:ea typeface="+mn-ea"/>
+                <a:cs typeface="+mn-cs"/>
+              </a:rPr>
+              <a:t>    &lt;style&gt;</a:t>
+            </a:r>
+          </a:p>
+          <a:p>
+            <a:r>
+              <a:rPr lang="en-GB" sz="1200" kern="1200" dirty="0">
+                <a:solidFill>
+                  <a:schemeClr val="tx1"/>
+                </a:solidFill>
+                <a:latin typeface="Montserrat" panose="00000500000000000000" pitchFamily="2" charset="0"/>
+                <a:ea typeface="+mn-ea"/>
+                <a:cs typeface="+mn-cs"/>
+              </a:rPr>
+              <a:t>        #UKimage {</a:t>
+            </a:r>
+          </a:p>
+          <a:p>
+            <a:r>
+              <a:rPr lang="en-GB" sz="1200" kern="1200" dirty="0">
+                <a:solidFill>
+                  <a:schemeClr val="tx1"/>
+                </a:solidFill>
+                <a:latin typeface="Montserrat" panose="00000500000000000000" pitchFamily="2" charset="0"/>
+                <a:ea typeface="+mn-ea"/>
+                <a:cs typeface="+mn-cs"/>
+              </a:rPr>
+              <a:t>            cursor: crosshair;</a:t>
+            </a:r>
+          </a:p>
+          <a:p>
+            <a:r>
+              <a:rPr lang="en-GB" sz="1200" kern="1200" dirty="0">
+                <a:solidFill>
+                  <a:schemeClr val="tx1"/>
+                </a:solidFill>
+                <a:latin typeface="Montserrat" panose="00000500000000000000" pitchFamily="2" charset="0"/>
+                <a:ea typeface="+mn-ea"/>
+                <a:cs typeface="+mn-cs"/>
+              </a:rPr>
+              <a:t>            margin: 50px;</a:t>
+            </a:r>
+          </a:p>
+          <a:p>
+            <a:r>
+              <a:rPr lang="en-GB" sz="1200" kern="1200" dirty="0">
+                <a:solidFill>
+                  <a:schemeClr val="tx1"/>
+                </a:solidFill>
+                <a:latin typeface="Montserrat" panose="00000500000000000000" pitchFamily="2" charset="0"/>
+                <a:ea typeface="+mn-ea"/>
+                <a:cs typeface="+mn-cs"/>
+              </a:rPr>
+              <a:t>        }</a:t>
+            </a:r>
+          </a:p>
+          <a:p>
+            <a:endParaRPr lang="en-GB" sz="1200" kern="1200" dirty="0">
+              <a:solidFill>
+                <a:schemeClr val="tx1"/>
+              </a:solidFill>
+              <a:latin typeface="Montserrat" panose="00000500000000000000" pitchFamily="2" charset="0"/>
+              <a:ea typeface="+mn-ea"/>
+              <a:cs typeface="+mn-cs"/>
+            </a:endParaRPr>
+          </a:p>
+          <a:p>
+            <a:r>
+              <a:rPr lang="en-GB" sz="1200" kern="1200" dirty="0">
+                <a:solidFill>
+                  <a:schemeClr val="tx1"/>
+                </a:solidFill>
+                <a:latin typeface="Montserrat" panose="00000500000000000000" pitchFamily="2" charset="0"/>
+                <a:ea typeface="+mn-ea"/>
+                <a:cs typeface="+mn-cs"/>
+              </a:rPr>
+              <a:t>        #div1{</a:t>
+            </a:r>
+          </a:p>
+          <a:p>
+            <a:r>
+              <a:rPr lang="en-GB" sz="1200" kern="1200" dirty="0">
+                <a:solidFill>
+                  <a:schemeClr val="tx1"/>
+                </a:solidFill>
+                <a:latin typeface="Montserrat" panose="00000500000000000000" pitchFamily="2" charset="0"/>
+                <a:ea typeface="+mn-ea"/>
+                <a:cs typeface="+mn-cs"/>
+              </a:rPr>
+              <a:t>            outline:2px solid blue;</a:t>
+            </a:r>
+          </a:p>
+          <a:p>
+            <a:r>
+              <a:rPr lang="en-GB" sz="1200" kern="1200" dirty="0">
+                <a:solidFill>
+                  <a:schemeClr val="tx1"/>
+                </a:solidFill>
+                <a:latin typeface="Montserrat" panose="00000500000000000000" pitchFamily="2" charset="0"/>
+                <a:ea typeface="+mn-ea"/>
+                <a:cs typeface="+mn-cs"/>
+              </a:rPr>
+              <a:t>            </a:t>
+            </a:r>
+            <a:r>
+              <a:rPr lang="en-GB" sz="1200" kern="1200" dirty="0" err="1">
+                <a:solidFill>
+                  <a:schemeClr val="tx1"/>
+                </a:solidFill>
+                <a:latin typeface="Montserrat" panose="00000500000000000000" pitchFamily="2" charset="0"/>
+                <a:ea typeface="+mn-ea"/>
+                <a:cs typeface="+mn-cs"/>
+              </a:rPr>
+              <a:t>background-color:black</a:t>
+            </a:r>
+            <a:r>
+              <a:rPr lang="en-GB" sz="1200" kern="1200" dirty="0">
+                <a:solidFill>
+                  <a:schemeClr val="tx1"/>
+                </a:solidFill>
+                <a:latin typeface="Montserrat" panose="00000500000000000000" pitchFamily="2" charset="0"/>
+                <a:ea typeface="+mn-ea"/>
+                <a:cs typeface="+mn-cs"/>
+              </a:rPr>
+              <a:t>;</a:t>
+            </a:r>
+          </a:p>
+          <a:p>
+            <a:r>
+              <a:rPr lang="en-GB" sz="1200" kern="1200" dirty="0">
+                <a:solidFill>
+                  <a:schemeClr val="tx1"/>
+                </a:solidFill>
+                <a:latin typeface="Montserrat" panose="00000500000000000000" pitchFamily="2" charset="0"/>
+                <a:ea typeface="+mn-ea"/>
+                <a:cs typeface="+mn-cs"/>
+              </a:rPr>
+              <a:t>            </a:t>
+            </a:r>
+            <a:r>
+              <a:rPr lang="en-GB" sz="1200" kern="1200" dirty="0" err="1">
+                <a:solidFill>
+                  <a:schemeClr val="tx1"/>
+                </a:solidFill>
+                <a:latin typeface="Montserrat" panose="00000500000000000000" pitchFamily="2" charset="0"/>
+                <a:ea typeface="+mn-ea"/>
+                <a:cs typeface="+mn-cs"/>
+              </a:rPr>
+              <a:t>color:white</a:t>
+            </a:r>
+            <a:r>
+              <a:rPr lang="en-GB" sz="1200" kern="1200" dirty="0">
+                <a:solidFill>
+                  <a:schemeClr val="tx1"/>
+                </a:solidFill>
+                <a:latin typeface="Montserrat" panose="00000500000000000000" pitchFamily="2" charset="0"/>
+                <a:ea typeface="+mn-ea"/>
+                <a:cs typeface="+mn-cs"/>
+              </a:rPr>
+              <a:t>;</a:t>
+            </a:r>
+          </a:p>
+          <a:p>
+            <a:r>
+              <a:rPr lang="en-GB" sz="1200" kern="1200" dirty="0">
+                <a:solidFill>
+                  <a:schemeClr val="tx1"/>
+                </a:solidFill>
+                <a:latin typeface="Montserrat" panose="00000500000000000000" pitchFamily="2" charset="0"/>
+                <a:ea typeface="+mn-ea"/>
+                <a:cs typeface="+mn-cs"/>
+              </a:rPr>
+              <a:t>            border-radius:5px;</a:t>
+            </a:r>
+          </a:p>
+          <a:p>
+            <a:r>
+              <a:rPr lang="en-GB" sz="1200" kern="1200" dirty="0">
+                <a:solidFill>
+                  <a:schemeClr val="tx1"/>
+                </a:solidFill>
+                <a:latin typeface="Montserrat" panose="00000500000000000000" pitchFamily="2" charset="0"/>
+                <a:ea typeface="+mn-ea"/>
+                <a:cs typeface="+mn-cs"/>
+              </a:rPr>
+              <a:t>            padding:3px;</a:t>
+            </a:r>
+          </a:p>
+          <a:p>
+            <a:r>
+              <a:rPr lang="en-GB" sz="1200" kern="1200" dirty="0">
+                <a:solidFill>
+                  <a:schemeClr val="tx1"/>
+                </a:solidFill>
+                <a:latin typeface="Montserrat" panose="00000500000000000000" pitchFamily="2" charset="0"/>
+                <a:ea typeface="+mn-ea"/>
+                <a:cs typeface="+mn-cs"/>
+              </a:rPr>
+              <a:t>        }</a:t>
+            </a:r>
+          </a:p>
+          <a:p>
+            <a:r>
+              <a:rPr lang="en-GB" sz="1200" kern="1200" dirty="0">
+                <a:solidFill>
+                  <a:schemeClr val="tx1"/>
+                </a:solidFill>
+                <a:latin typeface="Montserrat" panose="00000500000000000000" pitchFamily="2" charset="0"/>
+                <a:ea typeface="+mn-ea"/>
+                <a:cs typeface="+mn-cs"/>
+              </a:rPr>
+              <a:t>    &lt;/style&gt;</a:t>
+            </a:r>
+          </a:p>
+          <a:p>
+            <a:r>
+              <a:rPr lang="en-GB" sz="1200" kern="1200" dirty="0">
+                <a:solidFill>
+                  <a:schemeClr val="tx1"/>
+                </a:solidFill>
+                <a:latin typeface="Montserrat" panose="00000500000000000000" pitchFamily="2" charset="0"/>
+                <a:ea typeface="+mn-ea"/>
+                <a:cs typeface="+mn-cs"/>
+              </a:rPr>
+              <a:t>&lt;/head&gt;</a:t>
+            </a:r>
+          </a:p>
+          <a:p>
+            <a:r>
+              <a:rPr lang="en-GB" sz="1200" kern="1200" dirty="0">
+                <a:solidFill>
+                  <a:schemeClr val="tx1"/>
+                </a:solidFill>
+                <a:latin typeface="Montserrat" panose="00000500000000000000" pitchFamily="2" charset="0"/>
+                <a:ea typeface="+mn-ea"/>
+                <a:cs typeface="+mn-cs"/>
+              </a:rPr>
+              <a:t>&lt;body&gt;</a:t>
+            </a:r>
+          </a:p>
+          <a:p>
+            <a:r>
+              <a:rPr lang="en-GB" sz="1200" kern="1200" dirty="0">
+                <a:solidFill>
+                  <a:schemeClr val="tx1"/>
+                </a:solidFill>
+                <a:latin typeface="Montserrat" panose="00000500000000000000" pitchFamily="2" charset="0"/>
+                <a:ea typeface="+mn-ea"/>
+                <a:cs typeface="+mn-cs"/>
+              </a:rPr>
+              <a:t>    &lt;div id="div1" style="</a:t>
+            </a:r>
+            <a:r>
+              <a:rPr lang="en-GB" sz="1200" kern="1200" dirty="0" err="1">
+                <a:solidFill>
+                  <a:schemeClr val="tx1"/>
+                </a:solidFill>
+                <a:latin typeface="Montserrat" panose="00000500000000000000" pitchFamily="2" charset="0"/>
+                <a:ea typeface="+mn-ea"/>
+                <a:cs typeface="+mn-cs"/>
+              </a:rPr>
+              <a:t>position:absolute</a:t>
+            </a:r>
+            <a:r>
+              <a:rPr lang="en-GB" sz="1200" kern="1200" dirty="0">
+                <a:solidFill>
+                  <a:schemeClr val="tx1"/>
+                </a:solidFill>
+                <a:latin typeface="Montserrat" panose="00000500000000000000" pitchFamily="2" charset="0"/>
+                <a:ea typeface="+mn-ea"/>
+                <a:cs typeface="+mn-cs"/>
+              </a:rPr>
+              <a:t>"&gt;&lt;/div&gt;</a:t>
+            </a:r>
+          </a:p>
+          <a:p>
+            <a:r>
+              <a:rPr lang="en-GB" sz="1200" kern="1200" dirty="0">
+                <a:solidFill>
+                  <a:schemeClr val="tx1"/>
+                </a:solidFill>
+                <a:latin typeface="Montserrat" panose="00000500000000000000" pitchFamily="2" charset="0"/>
+                <a:ea typeface="+mn-ea"/>
+                <a:cs typeface="+mn-cs"/>
+              </a:rPr>
+              <a:t>    &lt;</a:t>
+            </a:r>
+            <a:r>
+              <a:rPr lang="en-GB" sz="1200" kern="1200" dirty="0" err="1">
+                <a:solidFill>
+                  <a:schemeClr val="tx1"/>
+                </a:solidFill>
+                <a:latin typeface="Montserrat" panose="00000500000000000000" pitchFamily="2" charset="0"/>
+                <a:ea typeface="+mn-ea"/>
+                <a:cs typeface="+mn-cs"/>
+              </a:rPr>
+              <a:t>img</a:t>
+            </a:r>
+            <a:r>
+              <a:rPr lang="en-GB" sz="1200" kern="1200" dirty="0">
+                <a:solidFill>
+                  <a:schemeClr val="tx1"/>
+                </a:solidFill>
+                <a:latin typeface="Montserrat" panose="00000500000000000000" pitchFamily="2" charset="0"/>
+                <a:ea typeface="+mn-ea"/>
+                <a:cs typeface="+mn-cs"/>
+              </a:rPr>
+              <a:t> src="https://img.posterlounge.co.uk/images/l/1698693.jpg" alt="UK map" id="</a:t>
+            </a:r>
+            <a:r>
+              <a:rPr lang="en-GB" sz="1200" kern="1200" dirty="0" err="1">
+                <a:solidFill>
+                  <a:schemeClr val="tx1"/>
+                </a:solidFill>
+                <a:latin typeface="Montserrat" panose="00000500000000000000" pitchFamily="2" charset="0"/>
+                <a:ea typeface="+mn-ea"/>
+                <a:cs typeface="+mn-cs"/>
+              </a:rPr>
+              <a:t>UKimage</a:t>
+            </a:r>
+            <a:r>
+              <a:rPr lang="en-GB" sz="1200" kern="1200" dirty="0">
+                <a:solidFill>
+                  <a:schemeClr val="tx1"/>
+                </a:solidFill>
+                <a:latin typeface="Montserrat" panose="00000500000000000000" pitchFamily="2" charset="0"/>
+                <a:ea typeface="+mn-ea"/>
+                <a:cs typeface="+mn-cs"/>
+              </a:rPr>
+              <a:t>" /&gt;</a:t>
+            </a:r>
+          </a:p>
+          <a:p>
+            <a:r>
+              <a:rPr lang="en-GB" sz="1200" kern="1200" dirty="0">
+                <a:solidFill>
+                  <a:schemeClr val="tx1"/>
+                </a:solidFill>
+                <a:latin typeface="Montserrat" panose="00000500000000000000" pitchFamily="2" charset="0"/>
+                <a:ea typeface="+mn-ea"/>
+                <a:cs typeface="+mn-cs"/>
+              </a:rPr>
+              <a:t>&lt;/body&gt;</a:t>
+            </a:r>
+          </a:p>
+          <a:p>
+            <a:r>
+              <a:rPr lang="en-GB" sz="1200" kern="1200" dirty="0">
+                <a:solidFill>
+                  <a:schemeClr val="tx1"/>
+                </a:solidFill>
+                <a:latin typeface="Montserrat" panose="00000500000000000000" pitchFamily="2" charset="0"/>
+                <a:ea typeface="+mn-ea"/>
+                <a:cs typeface="+mn-cs"/>
+              </a:rPr>
+              <a:t>&lt;/html&gt;</a:t>
+            </a:r>
+          </a:p>
+          <a:p>
+            <a:endParaRPr lang="en-IN" dirty="0"/>
           </a:p>
         </p:txBody>
       </p:sp>
@@ -2591,13 +3365,13 @@
           <p:nvPr userDrawn="1"/>
         </p:nvPicPr>
         <p:blipFill>
-          <a:blip r:embed="rId3">
+          <a:blip>
             <a:extLst>
               <a:ext uri="{28A0092B-C50C-407E-A947-70E740481C1C}">
                 <a14:useLocalDpi xmlns:a14="http://schemas.microsoft.com/office/drawing/2010/main" val="0"/>
               </a:ext>
               <a:ext uri="{96DAC541-7B7A-43D3-8B79-37D633B846F1}">
-                <asvg:svgBlip xmlns:asvg="http://schemas.microsoft.com/office/drawing/2016/SVG/main" r:embed="rId4"/>
+                <asvg:svgBlip xmlns:asvg="http://schemas.microsoft.com/office/drawing/2016/SVG/main" r:embed="rId3"/>
               </a:ext>
             </a:extLst>
           </a:blip>
@@ -10978,13 +11752,13 @@
           <p:nvPr userDrawn="1"/>
         </p:nvPicPr>
         <p:blipFill>
-          <a:blip r:embed="rId3">
+          <a:blip>
             <a:extLst>
               <a:ext uri="{28A0092B-C50C-407E-A947-70E740481C1C}">
                 <a14:useLocalDpi xmlns:a14="http://schemas.microsoft.com/office/drawing/2010/main" val="0"/>
               </a:ext>
               <a:ext uri="{96DAC541-7B7A-43D3-8B79-37D633B846F1}">
-                <asvg:svgBlip xmlns:asvg="http://schemas.microsoft.com/office/drawing/2016/SVG/main" r:embed="rId4"/>
+                <asvg:svgBlip xmlns:asvg="http://schemas.microsoft.com/office/drawing/2016/SVG/main" r:embed="rId3"/>
               </a:ext>
             </a:extLst>
           </a:blip>
@@ -18155,13 +18929,13 @@
           <p:nvPr userDrawn="1"/>
         </p:nvPicPr>
         <p:blipFill>
-          <a:blip r:embed="rId3">
+          <a:blip>
             <a:extLst>
               <a:ext uri="{28A0092B-C50C-407E-A947-70E740481C1C}">
                 <a14:useLocalDpi xmlns:a14="http://schemas.microsoft.com/office/drawing/2010/main" val="0"/>
               </a:ext>
               <a:ext uri="{96DAC541-7B7A-43D3-8B79-37D633B846F1}">
-                <asvg:svgBlip xmlns:asvg="http://schemas.microsoft.com/office/drawing/2016/SVG/main" r:embed="rId4"/>
+                <asvg:svgBlip xmlns:asvg="http://schemas.microsoft.com/office/drawing/2016/SVG/main" r:embed="rId3"/>
               </a:ext>
             </a:extLst>
           </a:blip>
@@ -20782,13 +21556,13 @@
           <p:nvPr userDrawn="1"/>
         </p:nvPicPr>
         <p:blipFill>
-          <a:blip r:embed="rId3">
+          <a:blip>
             <a:extLst>
               <a:ext uri="{28A0092B-C50C-407E-A947-70E740481C1C}">
                 <a14:useLocalDpi xmlns:a14="http://schemas.microsoft.com/office/drawing/2010/main" val="0"/>
               </a:ext>
               <a:ext uri="{96DAC541-7B7A-43D3-8B79-37D633B846F1}">
-                <asvg:svgBlip xmlns:asvg="http://schemas.microsoft.com/office/drawing/2016/SVG/main" r:embed="rId4"/>
+                <asvg:svgBlip xmlns:asvg="http://schemas.microsoft.com/office/drawing/2016/SVG/main" r:embed="rId3"/>
               </a:ext>
             </a:extLst>
           </a:blip>
@@ -22247,13 +23021,13 @@
           <p:nvPr userDrawn="1"/>
         </p:nvPicPr>
         <p:blipFill>
-          <a:blip r:embed="rId3">
+          <a:blip>
             <a:extLst>
               <a:ext uri="{28A0092B-C50C-407E-A947-70E740481C1C}">
                 <a14:useLocalDpi xmlns:a14="http://schemas.microsoft.com/office/drawing/2010/main" val="0"/>
               </a:ext>
               <a:ext uri="{96DAC541-7B7A-43D3-8B79-37D633B846F1}">
-                <asvg:svgBlip xmlns:asvg="http://schemas.microsoft.com/office/drawing/2016/SVG/main" r:embed="rId4"/>
+                <asvg:svgBlip xmlns:asvg="http://schemas.microsoft.com/office/drawing/2016/SVG/main" r:embed="rId3"/>
               </a:ext>
             </a:extLst>
           </a:blip>
@@ -30380,18 +31154,9 @@
             </a:r>
           </a:p>
           <a:p>
-            <a:pPr marL="799200" lvl="1" indent="-457200">
-              <a:buSzPct val="115000"/>
-              <a:buFont typeface="Arial" panose="020B0604020202020204" pitchFamily="34" charset="0"/>
-              <a:buChar char="•"/>
+            <a:pPr marL="88900" lvl="1" indent="0">
+              <a:buNone/>
             </a:pPr>
-            <a:r>
-              <a:rPr lang="en-GB" dirty="0"/>
-              <a:t>In this part we will look at the second option</a:t>
-            </a:r>
-          </a:p>
-          <a:p>
-            <a:pPr lvl="1"/>
             <a:endParaRPr lang="en-GB" dirty="0"/>
           </a:p>
           <a:p>
@@ -30414,19 +31179,6 @@
           </a:p>
           <a:p>
             <a:endParaRPr lang="en-GB" dirty="0"/>
-          </a:p>
-          <a:p>
-            <a:endParaRPr lang="en-GB" dirty="0"/>
-          </a:p>
-          <a:p>
-            <a:pPr marL="342900" indent="-342900">
-              <a:buFont typeface="Arial" panose="020B0604020202020204" pitchFamily="34" charset="0"/>
-              <a:buChar char="•"/>
-            </a:pPr>
-            <a:r>
-              <a:rPr lang="en-GB" b="1" dirty="0"/>
-              <a:t>In IE 8 and below do:</a:t>
-            </a:r>
           </a:p>
         </p:txBody>
       </p:sp>
@@ -30438,24 +31190,32 @@
         </p:nvSpPr>
         <p:spPr>
           <a:xfrm>
-            <a:off x="717411" y="3785982"/>
-            <a:ext cx="6780669" cy="599886"/>
+            <a:off x="1234246" y="3608847"/>
+            <a:ext cx="8685006" cy="1711536"/>
           </a:xfrm>
           <a:prstGeom prst="rect">
             <a:avLst/>
           </a:prstGeom>
           <a:solidFill>
-            <a:schemeClr val="bg1">
-              <a:lumMod val="95000"/>
+            <a:schemeClr val="accent5">
+              <a:lumMod val="20000"/>
+              <a:lumOff val="80000"/>
             </a:schemeClr>
           </a:solidFill>
           <a:ln w="19050">
             <a:solidFill>
-              <a:schemeClr val="accent1">
-                <a:lumMod val="75000"/>
+              <a:schemeClr val="bg1">
+                <a:lumMod val="95000"/>
               </a:schemeClr>
             </a:solidFill>
           </a:ln>
+          <a:effectLst>
+            <a:outerShdw blurRad="50800" dist="38100" algn="l" rotWithShape="0">
+              <a:prstClr val="black">
+                <a:alpha val="40000"/>
+              </a:prstClr>
+            </a:outerShdw>
+          </a:effectLst>
         </p:spPr>
         <p:txBody>
           <a:bodyPr wrap="square" lIns="132923" tIns="33231" rIns="0" bIns="33231" rtlCol="0">
@@ -30463,8 +31223,13 @@
           </a:bodyPr>
           <a:lstStyle/>
           <a:p>
-            <a:r>
-              <a:rPr lang="en-GB" dirty="0" err="1">
+            <a:pPr>
+              <a:lnSpc>
+                <a:spcPct val="200000"/>
+              </a:lnSpc>
+            </a:pPr>
+            <a:r>
+              <a:rPr lang="en-GB" sz="2000" b="1" dirty="0" err="1">
                 <a:solidFill>
                   <a:srgbClr val="000000"/>
                 </a:solidFill>
@@ -30473,7 +31238,7 @@
               <a:t>var</a:t>
             </a:r>
             <a:r>
-              <a:rPr lang="en-GB" dirty="0">
+              <a:rPr lang="en-GB" sz="2000" b="1" dirty="0">
                 <a:solidFill>
                   <a:srgbClr val="000000"/>
                 </a:solidFill>
@@ -30482,19 +31247,19 @@
               <a:t> </a:t>
             </a:r>
             <a:r>
-              <a:rPr lang="en-GB" dirty="0" err="1">
+              <a:rPr lang="en-GB" sz="2000" b="1" dirty="0" err="1">
                 <a:latin typeface="Consolas"/>
               </a:rPr>
               <a:t>myControl</a:t>
             </a:r>
             <a:r>
-              <a:rPr lang="en-GB" dirty="0">
+              <a:rPr lang="en-GB" sz="2000" b="1" dirty="0">
                 <a:latin typeface="Consolas"/>
               </a:rPr>
               <a:t> = </a:t>
             </a:r>
             <a:r>
-              <a:rPr lang="en-GB" dirty="0" err="1">
+              <a:rPr lang="en-GB" sz="2000" b="1" dirty="0" err="1">
                 <a:solidFill>
                   <a:srgbClr val="000000"/>
                 </a:solidFill>
@@ -30503,7 +31268,7 @@
               <a:t>document.getElementById</a:t>
             </a:r>
             <a:r>
-              <a:rPr lang="en-GB" dirty="0">
+              <a:rPr lang="en-GB" sz="2000" b="1" dirty="0">
                 <a:solidFill>
                   <a:srgbClr val="000000"/>
                 </a:solidFill>
@@ -30512,7 +31277,7 @@
               <a:t>(</a:t>
             </a:r>
             <a:r>
-              <a:rPr lang="en-GB" dirty="0">
+              <a:rPr lang="en-GB" sz="2000" b="1" dirty="0">
                 <a:solidFill>
                   <a:srgbClr val="A31515"/>
                 </a:solidFill>
@@ -30521,7 +31286,7 @@
               <a:t>'footer'</a:t>
             </a:r>
             <a:r>
-              <a:rPr lang="en-GB" dirty="0">
+              <a:rPr lang="en-GB" sz="2000" b="1" dirty="0">
                 <a:solidFill>
                   <a:srgbClr val="000000"/>
                 </a:solidFill>
@@ -30529,144 +31294,54 @@
               </a:rPr>
               <a:t>);</a:t>
             </a:r>
-            <a:endParaRPr lang="en-GB" sz="1662" dirty="0">
+            <a:endParaRPr lang="en-GB" b="1" dirty="0">
               <a:latin typeface="Consolas"/>
             </a:endParaRPr>
           </a:p>
           <a:p>
-            <a:r>
-              <a:rPr lang="en-GB" sz="1662" dirty="0" err="1">
+            <a:pPr>
+              <a:lnSpc>
+                <a:spcPct val="200000"/>
+              </a:lnSpc>
+            </a:pPr>
+            <a:r>
+              <a:rPr lang="en-GB" b="1" dirty="0" err="1">
                 <a:latin typeface="Consolas"/>
               </a:rPr>
-              <a:t>myControl.</a:t>
-            </a:r>
-            <a:r>
-              <a:rPr lang="en-GB" sz="1662" b="1" dirty="0" err="1">
+              <a:t>myControl.addEventListener</a:t>
+            </a:r>
+            <a:r>
+              <a:rPr lang="en-GB" b="1" dirty="0">
                 <a:latin typeface="Consolas"/>
               </a:rPr>
-              <a:t>addEventListener</a:t>
-            </a:r>
-            <a:r>
-              <a:rPr lang="en-GB" sz="1662" b="1" dirty="0">
+              <a:t>(</a:t>
+            </a:r>
+            <a:r>
+              <a:rPr lang="en-GB" b="1" dirty="0">
+                <a:solidFill>
+                  <a:srgbClr val="800000"/>
+                </a:solidFill>
                 <a:latin typeface="Consolas"/>
               </a:rPr>
-              <a:t>(</a:t>
-            </a:r>
-            <a:r>
-              <a:rPr lang="en-GB" sz="1662" b="1" dirty="0">
-                <a:solidFill>
-                  <a:srgbClr val="800000"/>
+              <a:t>'click', </a:t>
+            </a:r>
+            <a:r>
+              <a:rPr lang="en-GB" b="1" dirty="0">
+                <a:solidFill>
+                  <a:srgbClr val="0000FF"/>
                 </a:solidFill>
                 <a:latin typeface="Consolas"/>
               </a:rPr>
-              <a:t>'click', </a:t>
-            </a:r>
-            <a:r>
-              <a:rPr lang="en-GB" sz="1662" b="1" dirty="0">
-                <a:solidFill>
-                  <a:srgbClr val="0000FF"/>
-                </a:solidFill>
-                <a:latin typeface="Consolas"/>
-              </a:rPr>
               <a:t>function(){    });</a:t>
             </a:r>
           </a:p>
-        </p:txBody>
-      </p:sp>
-      <p:sp>
-        <p:nvSpPr>
-          <p:cNvPr id="6" name="TextBox 5"/>
-          <p:cNvSpPr txBox="1"/>
-          <p:nvPr/>
-        </p:nvSpPr>
-        <p:spPr>
-          <a:xfrm>
-            <a:off x="717411" y="4978856"/>
-            <a:ext cx="6780669" cy="578661"/>
-          </a:xfrm>
-          <a:prstGeom prst="rect">
-            <a:avLst/>
-          </a:prstGeom>
-          <a:solidFill>
-            <a:schemeClr val="bg1">
-              <a:lumMod val="95000"/>
-            </a:schemeClr>
-          </a:solidFill>
-          <a:ln w="19050">
-            <a:solidFill>
-              <a:schemeClr val="accent1">
-                <a:lumMod val="75000"/>
-              </a:schemeClr>
-            </a:solidFill>
-          </a:ln>
-        </p:spPr>
-        <p:txBody>
-          <a:bodyPr wrap="square" lIns="132923" tIns="33231" rIns="0" bIns="33231" rtlCol="0">
-            <a:spAutoFit/>
-          </a:bodyPr>
-          <a:lstStyle/>
-          <a:p>
-            <a:r>
-              <a:rPr lang="en-GB" sz="1662" dirty="0" err="1">
-                <a:latin typeface="Consolas"/>
-              </a:rPr>
-              <a:t>myControl</a:t>
-            </a:r>
-            <a:r>
-              <a:rPr lang="en-GB" sz="1662" dirty="0">
-                <a:latin typeface="Consolas"/>
-              </a:rPr>
-              <a:t>.</a:t>
-            </a:r>
-            <a:r>
-              <a:rPr lang="en-US" sz="1662" b="1" dirty="0" err="1"/>
-              <a:t>attachEvent</a:t>
-            </a:r>
-            <a:r>
-              <a:rPr lang="en-GB" sz="1662" b="1" dirty="0">
-                <a:latin typeface="Consolas"/>
-              </a:rPr>
-              <a:t>(</a:t>
-            </a:r>
-            <a:r>
-              <a:rPr lang="en-GB" sz="1662" b="1" dirty="0">
-                <a:solidFill>
-                  <a:srgbClr val="800000"/>
-                </a:solidFill>
-                <a:latin typeface="Consolas"/>
-              </a:rPr>
-              <a:t>'</a:t>
-            </a:r>
-            <a:r>
-              <a:rPr lang="en-GB" sz="1662" b="1" dirty="0" err="1">
-                <a:solidFill>
-                  <a:srgbClr val="800000"/>
-                </a:solidFill>
-                <a:latin typeface="Consolas"/>
-              </a:rPr>
-              <a:t>onclick</a:t>
-            </a:r>
-            <a:r>
-              <a:rPr lang="en-GB" sz="1662" b="1" dirty="0">
-                <a:solidFill>
-                  <a:srgbClr val="800000"/>
-                </a:solidFill>
-                <a:latin typeface="Consolas"/>
-              </a:rPr>
-              <a:t>', </a:t>
-            </a:r>
-            <a:r>
-              <a:rPr lang="en-GB" sz="1662" b="1" dirty="0">
-                <a:solidFill>
-                  <a:srgbClr val="0000FF"/>
-                </a:solidFill>
-                <a:latin typeface="Consolas"/>
-              </a:rPr>
-              <a:t>function(){    });</a:t>
-            </a:r>
-          </a:p>
-          <a:p>
-            <a:endParaRPr lang="en-GB" sz="1662" b="1" dirty="0">
+          <a:p>
+            <a:pPr>
+              <a:lnSpc>
+                <a:spcPct val="200000"/>
+              </a:lnSpc>
+            </a:pPr>
+            <a:endParaRPr lang="en-GB" b="1" dirty="0">
               <a:solidFill>
                 <a:srgbClr val="0000FF"/>
               </a:solidFill>
@@ -30722,13 +31397,8 @@
           <a:p>
             <a:r>
               <a:rPr lang="en-GB" dirty="0"/>
-              <a:t>How to setup events using </a:t>
-            </a:r>
-            <a:r>
-              <a:rPr lang="en-GB" dirty="0" err="1"/>
-              <a:t>Jquery</a:t>
-            </a:r>
-            <a:endParaRPr lang="en-GB" dirty="0"/>
+              <a:t>How to setup events using jQuery</a:t>
+            </a:r>
           </a:p>
         </p:txBody>
       </p:sp>
@@ -30824,6 +31494,13 @@
               <a:buFont typeface="Arial" panose="020B0604020202020204" pitchFamily="34" charset="0"/>
               <a:buChar char="•"/>
             </a:pPr>
+            <a:endParaRPr lang="en-US" b="1" dirty="0"/>
+          </a:p>
+          <a:p>
+            <a:pPr marL="342900" indent="-342900">
+              <a:buFont typeface="Arial" panose="020B0604020202020204" pitchFamily="34" charset="0"/>
+              <a:buChar char="•"/>
+            </a:pPr>
             <a:r>
               <a:rPr lang="en-US" b="1" dirty="0"/>
               <a:t>See also: </a:t>
@@ -30870,33 +31547,54 @@
       </p:sp>
       <p:sp>
         <p:nvSpPr>
-          <p:cNvPr id="6" name="Rectangle 5"/>
-          <p:cNvSpPr/>
+          <p:cNvPr id="5" name="TextBox 4">
+            <a:extLst>
+              <a:ext uri="{FF2B5EF4-FFF2-40B4-BE49-F238E27FC236}">
+                <a16:creationId xmlns:a16="http://schemas.microsoft.com/office/drawing/2014/main" id="{5D493898-E941-4FA3-BE4D-A606345370FA}"/>
+              </a:ext>
+            </a:extLst>
+          </p:cNvPr>
+          <p:cNvSpPr txBox="1"/>
           <p:nvPr/>
         </p:nvSpPr>
         <p:spPr>
           <a:xfrm>
-            <a:off x="2302717" y="2274838"/>
-            <a:ext cx="5648630" cy="2554545"/>
+            <a:off x="1953040" y="1808921"/>
+            <a:ext cx="7588526" cy="3273973"/>
           </a:xfrm>
           <a:prstGeom prst="rect">
             <a:avLst/>
           </a:prstGeom>
-          <a:ln w="25400">
+          <a:solidFill>
+            <a:schemeClr val="accent5">
+              <a:lumMod val="20000"/>
+              <a:lumOff val="80000"/>
+            </a:schemeClr>
+          </a:solidFill>
+          <a:ln>
             <a:solidFill>
-              <a:srgbClr val="004050"/>
+              <a:schemeClr val="bg1">
+                <a:lumMod val="95000"/>
+              </a:schemeClr>
             </a:solidFill>
           </a:ln>
+          <a:effectLst>
+            <a:outerShdw blurRad="50800" dist="38100" algn="l" rotWithShape="0">
+              <a:prstClr val="black">
+                <a:alpha val="40000"/>
+              </a:prstClr>
+            </a:outerShdw>
+          </a:effectLst>
         </p:spPr>
         <p:style>
           <a:lnRef idx="2">
-            <a:schemeClr val="accent1"/>
+            <a:schemeClr val="dk1"/>
           </a:lnRef>
           <a:fillRef idx="1">
             <a:schemeClr val="lt1"/>
           </a:fillRef>
           <a:effectRef idx="0">
-            <a:schemeClr val="accent1"/>
+            <a:schemeClr val="dk1"/>
           </a:effectRef>
           <a:fontRef idx="minor">
             <a:schemeClr val="dk1"/>
@@ -30908,480 +31606,249 @@
           </a:bodyPr>
           <a:lstStyle/>
           <a:p>
-            <a:r>
-              <a:rPr lang="en-GB" sz="1600" b="1" dirty="0">
+            <a:pPr>
+              <a:lnSpc>
+                <a:spcPct val="150000"/>
+              </a:lnSpc>
+            </a:pPr>
+            <a:r>
+              <a:rPr lang="en-GB" sz="2000" b="1" dirty="0">
+                <a:solidFill>
+                  <a:srgbClr val="000000"/>
+                </a:solidFill>
+                <a:latin typeface="Consolas" panose="020B0609020204030204" pitchFamily="49" charset="0"/>
+              </a:rPr>
+              <a:t> </a:t>
+            </a:r>
+            <a:r>
+              <a:rPr lang="en-GB" sz="2000" b="1" dirty="0">
                 <a:solidFill>
                   <a:srgbClr val="0000FF"/>
                 </a:solidFill>
-                <a:highlight>
-                  <a:srgbClr val="FFFFFF"/>
-                </a:highlight>
                 <a:latin typeface="Consolas" panose="020B0609020204030204" pitchFamily="49" charset="0"/>
               </a:rPr>
               <a:t>&lt;</a:t>
             </a:r>
             <a:r>
-              <a:rPr lang="en-GB" sz="1600" b="1" dirty="0">
+              <a:rPr lang="en-GB" sz="2000" b="1" dirty="0">
                 <a:solidFill>
                   <a:srgbClr val="800000"/>
                 </a:solidFill>
-                <a:highlight>
-                  <a:srgbClr val="FFFFFF"/>
-                </a:highlight>
                 <a:latin typeface="Consolas" panose="020B0609020204030204" pitchFamily="49" charset="0"/>
               </a:rPr>
               <a:t>script</a:t>
             </a:r>
             <a:r>
-              <a:rPr lang="en-GB" sz="1600" b="1" dirty="0">
+              <a:rPr lang="en-GB" sz="2000" b="1" dirty="0">
                 <a:solidFill>
                   <a:srgbClr val="0000FF"/>
                 </a:solidFill>
-                <a:highlight>
-                  <a:srgbClr val="FFFFFF"/>
-                </a:highlight>
                 <a:latin typeface="Consolas" panose="020B0609020204030204" pitchFamily="49" charset="0"/>
               </a:rPr>
               <a:t>&gt;</a:t>
             </a:r>
-            <a:endParaRPr lang="en-GB" sz="1600" b="1" dirty="0">
+            <a:endParaRPr lang="en-GB" sz="2000" b="1" dirty="0">
               <a:solidFill>
                 <a:srgbClr val="000000"/>
               </a:solidFill>
-              <a:highlight>
-                <a:srgbClr val="FFFFFF"/>
-              </a:highlight>
               <a:latin typeface="Consolas" panose="020B0609020204030204" pitchFamily="49" charset="0"/>
             </a:endParaRPr>
           </a:p>
           <a:p>
-            <a:r>
-              <a:rPr lang="en-GB" sz="1600" b="1" dirty="0">
+            <a:pPr>
+              <a:lnSpc>
+                <a:spcPct val="150000"/>
+              </a:lnSpc>
+            </a:pPr>
+            <a:r>
+              <a:rPr lang="en-GB" sz="2000" b="1" dirty="0">
                 <a:solidFill>
                   <a:srgbClr val="000000"/>
                 </a:solidFill>
-                <a:highlight>
-                  <a:srgbClr val="FFFFFF"/>
-                </a:highlight>
-                <a:latin typeface="Consolas" panose="020B0609020204030204" pitchFamily="49" charset="0"/>
-              </a:rPr>
-              <a:t>     $(</a:t>
-            </a:r>
-            <a:r>
-              <a:rPr lang="en-GB" sz="1600" b="1" dirty="0">
+                <a:latin typeface="Consolas" panose="020B0609020204030204" pitchFamily="49" charset="0"/>
+              </a:rPr>
+              <a:t>        $(</a:t>
+            </a:r>
+            <a:r>
+              <a:rPr lang="en-GB" sz="2000" b="1" dirty="0">
                 <a:solidFill>
                   <a:srgbClr val="0000FF"/>
                 </a:solidFill>
-                <a:highlight>
-                  <a:srgbClr val="FFFFFF"/>
-                </a:highlight>
                 <a:latin typeface="Consolas" panose="020B0609020204030204" pitchFamily="49" charset="0"/>
               </a:rPr>
               <a:t>function</a:t>
             </a:r>
             <a:r>
-              <a:rPr lang="en-GB" sz="1600" b="1" dirty="0">
+              <a:rPr lang="en-GB" sz="2000" b="1" dirty="0">
                 <a:solidFill>
                   <a:srgbClr val="000000"/>
                 </a:solidFill>
-                <a:highlight>
-                  <a:srgbClr val="FFFFFF"/>
-                </a:highlight>
                 <a:latin typeface="Consolas" panose="020B0609020204030204" pitchFamily="49" charset="0"/>
               </a:rPr>
               <a:t> () {</a:t>
             </a:r>
           </a:p>
           <a:p>
-            <a:r>
-              <a:rPr lang="en-GB" sz="1600" b="1" dirty="0">
+            <a:pPr>
+              <a:lnSpc>
+                <a:spcPct val="150000"/>
+              </a:lnSpc>
+            </a:pPr>
+            <a:r>
+              <a:rPr lang="en-GB" sz="2000" b="1" dirty="0">
                 <a:solidFill>
                   <a:srgbClr val="000000"/>
                 </a:solidFill>
-                <a:highlight>
-                  <a:srgbClr val="FFFFFF"/>
-                </a:highlight>
-                <a:latin typeface="Consolas" panose="020B0609020204030204" pitchFamily="49" charset="0"/>
-              </a:rPr>
-              <a:t>          $(</a:t>
-            </a:r>
-            <a:r>
-              <a:rPr lang="en-GB" sz="1600" b="1" dirty="0">
+                <a:latin typeface="Consolas" panose="020B0609020204030204" pitchFamily="49" charset="0"/>
+              </a:rPr>
+              <a:t>            $(</a:t>
+            </a:r>
+            <a:r>
+              <a:rPr lang="en-GB" sz="2000" b="1" dirty="0">
                 <a:solidFill>
                   <a:srgbClr val="A31515"/>
                 </a:solidFill>
-                <a:highlight>
-                  <a:srgbClr val="FFFFFF"/>
-                </a:highlight>
                 <a:latin typeface="Consolas" panose="020B0609020204030204" pitchFamily="49" charset="0"/>
               </a:rPr>
               <a:t>"#div1"</a:t>
             </a:r>
             <a:r>
-              <a:rPr lang="en-GB" sz="1600" b="1" dirty="0">
+              <a:rPr lang="en-GB" sz="2000" b="1" dirty="0">
                 <a:solidFill>
                   <a:srgbClr val="000000"/>
                 </a:solidFill>
-                <a:highlight>
-                  <a:srgbClr val="FFFFFF"/>
-                </a:highlight>
                 <a:latin typeface="Consolas" panose="020B0609020204030204" pitchFamily="49" charset="0"/>
               </a:rPr>
               <a:t>).click(</a:t>
             </a:r>
             <a:r>
-              <a:rPr lang="en-GB" sz="1600" b="1" dirty="0">
+              <a:rPr lang="en-GB" sz="2000" b="1" dirty="0">
                 <a:solidFill>
                   <a:srgbClr val="0000FF"/>
                 </a:solidFill>
-                <a:highlight>
-                  <a:srgbClr val="FFFFFF"/>
-                </a:highlight>
                 <a:latin typeface="Consolas" panose="020B0609020204030204" pitchFamily="49" charset="0"/>
               </a:rPr>
               <a:t>function</a:t>
             </a:r>
             <a:r>
-              <a:rPr lang="en-GB" sz="1600" b="1" dirty="0">
+              <a:rPr lang="en-GB" sz="2000" b="1" dirty="0">
                 <a:solidFill>
                   <a:srgbClr val="000000"/>
                 </a:solidFill>
-                <a:highlight>
-                  <a:srgbClr val="FFFFFF"/>
-                </a:highlight>
                 <a:latin typeface="Consolas" panose="020B0609020204030204" pitchFamily="49" charset="0"/>
               </a:rPr>
               <a:t> (e) {</a:t>
             </a:r>
           </a:p>
           <a:p>
-            <a:r>
-              <a:rPr lang="en-GB" sz="1600" b="1" dirty="0">
+            <a:pPr>
+              <a:lnSpc>
+                <a:spcPct val="150000"/>
+              </a:lnSpc>
+            </a:pPr>
+            <a:r>
+              <a:rPr lang="en-GB" sz="2000" b="1" dirty="0">
                 <a:solidFill>
                   <a:srgbClr val="000000"/>
                 </a:solidFill>
-                <a:highlight>
-                  <a:srgbClr val="FFFFFF"/>
-                </a:highlight>
                 <a:latin typeface="Consolas" panose="020B0609020204030204" pitchFamily="49" charset="0"/>
               </a:rPr>
               <a:t>                alert(</a:t>
             </a:r>
             <a:r>
-              <a:rPr lang="en-GB" sz="1600" b="1" dirty="0">
+              <a:rPr lang="en-GB" sz="2000" b="1" dirty="0">
                 <a:solidFill>
                   <a:srgbClr val="A31515"/>
                 </a:solidFill>
-                <a:highlight>
-                  <a:srgbClr val="FFFFFF"/>
-                </a:highlight>
                 <a:latin typeface="Consolas" panose="020B0609020204030204" pitchFamily="49" charset="0"/>
               </a:rPr>
               <a:t>"Hello!"</a:t>
             </a:r>
             <a:r>
-              <a:rPr lang="en-GB" sz="1600" b="1" dirty="0">
+              <a:rPr lang="en-GB" sz="2000" b="1" dirty="0">
                 <a:solidFill>
                   <a:srgbClr val="000000"/>
                 </a:solidFill>
-                <a:highlight>
-                  <a:srgbClr val="FFFFFF"/>
-                </a:highlight>
                 <a:latin typeface="Consolas" panose="020B0609020204030204" pitchFamily="49" charset="0"/>
               </a:rPr>
               <a:t>);</a:t>
             </a:r>
           </a:p>
           <a:p>
-            <a:r>
-              <a:rPr lang="en-GB" sz="1600" b="1" dirty="0">
+            <a:pPr>
+              <a:lnSpc>
+                <a:spcPct val="150000"/>
+              </a:lnSpc>
+            </a:pPr>
+            <a:r>
+              <a:rPr lang="en-GB" sz="2000" b="1" dirty="0">
                 <a:solidFill>
                   <a:srgbClr val="000000"/>
                 </a:solidFill>
-                <a:highlight>
-                  <a:srgbClr val="FFFFFF"/>
-                </a:highlight>
-                <a:latin typeface="Consolas" panose="020B0609020204030204" pitchFamily="49" charset="0"/>
-              </a:rPr>
-              <a:t>          });</a:t>
-            </a:r>
-          </a:p>
-          <a:p>
-            <a:r>
-              <a:rPr lang="en-GB" sz="1600" b="1" dirty="0">
+                <a:latin typeface="Consolas" panose="020B0609020204030204" pitchFamily="49" charset="0"/>
+              </a:rPr>
+              <a:t>            });</a:t>
+            </a:r>
+          </a:p>
+          <a:p>
+            <a:pPr>
+              <a:lnSpc>
+                <a:spcPct val="150000"/>
+              </a:lnSpc>
+            </a:pPr>
+            <a:r>
+              <a:rPr lang="en-GB" sz="2000" b="1" dirty="0">
                 <a:solidFill>
                   <a:srgbClr val="000000"/>
                 </a:solidFill>
-                <a:highlight>
-                  <a:srgbClr val="FFFFFF"/>
-                </a:highlight>
-                <a:latin typeface="Consolas" panose="020B0609020204030204" pitchFamily="49" charset="0"/>
-              </a:rPr>
-              <a:t>      });</a:t>
-            </a:r>
-          </a:p>
-          <a:p>
-            <a:r>
-              <a:rPr lang="en-GB" sz="1600" b="1" dirty="0">
+                <a:latin typeface="Consolas" panose="020B0609020204030204" pitchFamily="49" charset="0"/>
+              </a:rPr>
+              <a:t>        });</a:t>
+            </a:r>
+          </a:p>
+          <a:p>
+            <a:pPr>
+              <a:lnSpc>
+                <a:spcPct val="150000"/>
+              </a:lnSpc>
+            </a:pPr>
+            <a:r>
+              <a:rPr lang="en-GB" sz="2000" b="1" dirty="0">
+                <a:solidFill>
+                  <a:srgbClr val="000000"/>
+                </a:solidFill>
+                <a:latin typeface="Consolas" panose="020B0609020204030204" pitchFamily="49" charset="0"/>
+              </a:rPr>
+              <a:t> </a:t>
+            </a:r>
+            <a:r>
+              <a:rPr lang="en-GB" sz="2000" b="1" dirty="0">
                 <a:solidFill>
                   <a:srgbClr val="0000FF"/>
                 </a:solidFill>
-                <a:highlight>
-                  <a:srgbClr val="FFFFFF"/>
-                </a:highlight>
                 <a:latin typeface="Consolas" panose="020B0609020204030204" pitchFamily="49" charset="0"/>
               </a:rPr>
               <a:t>&lt;/</a:t>
             </a:r>
             <a:r>
-              <a:rPr lang="en-GB" sz="1600" b="1" dirty="0">
+              <a:rPr lang="en-GB" sz="2000" b="1" dirty="0">
                 <a:solidFill>
                   <a:srgbClr val="800000"/>
                 </a:solidFill>
-                <a:highlight>
-                  <a:srgbClr val="FFFFFF"/>
-                </a:highlight>
                 <a:latin typeface="Consolas" panose="020B0609020204030204" pitchFamily="49" charset="0"/>
               </a:rPr>
               <a:t>script</a:t>
             </a:r>
             <a:r>
-              <a:rPr lang="en-GB" sz="1600" b="1" dirty="0">
+              <a:rPr lang="en-GB" sz="2000" b="1" dirty="0">
                 <a:solidFill>
                   <a:srgbClr val="0000FF"/>
                 </a:solidFill>
-                <a:highlight>
-                  <a:srgbClr val="FFFFFF"/>
-                </a:highlight>
                 <a:latin typeface="Consolas" panose="020B0609020204030204" pitchFamily="49" charset="0"/>
               </a:rPr>
               <a:t>&gt;</a:t>
             </a:r>
-            <a:endParaRPr lang="en-GB" sz="1600" b="1" dirty="0">
-              <a:solidFill>
-                <a:srgbClr val="000000"/>
-              </a:solidFill>
-              <a:highlight>
-                <a:srgbClr val="FFFFFF"/>
-              </a:highlight>
-              <a:latin typeface="Consolas" panose="020B0609020204030204" pitchFamily="49" charset="0"/>
-            </a:endParaRPr>
-          </a:p>
-          <a:p>
-            <a:r>
-              <a:rPr lang="en-GB" sz="1600" b="1" dirty="0">
-                <a:solidFill>
-                  <a:srgbClr val="0000FF"/>
-                </a:solidFill>
-                <a:highlight>
-                  <a:srgbClr val="FFFFFF"/>
-                </a:highlight>
-                <a:latin typeface="Consolas" panose="020B0609020204030204" pitchFamily="49" charset="0"/>
-              </a:rPr>
-              <a:t>&lt;</a:t>
-            </a:r>
-            <a:r>
-              <a:rPr lang="en-GB" sz="1600" b="1" dirty="0">
-                <a:solidFill>
-                  <a:srgbClr val="800000"/>
-                </a:solidFill>
-                <a:highlight>
-                  <a:srgbClr val="FFFFFF"/>
-                </a:highlight>
-                <a:latin typeface="Consolas" panose="020B0609020204030204" pitchFamily="49" charset="0"/>
-              </a:rPr>
-              <a:t>body</a:t>
-            </a:r>
-            <a:r>
-              <a:rPr lang="en-GB" sz="1600" b="1" dirty="0">
-                <a:solidFill>
-                  <a:srgbClr val="0000FF"/>
-                </a:solidFill>
-                <a:highlight>
-                  <a:srgbClr val="FFFFFF"/>
-                </a:highlight>
-                <a:latin typeface="Consolas" panose="020B0609020204030204" pitchFamily="49" charset="0"/>
-              </a:rPr>
-              <a:t>&gt;</a:t>
-            </a:r>
-            <a:endParaRPr lang="en-GB" sz="1600" b="1" dirty="0">
-              <a:solidFill>
-                <a:srgbClr val="000000"/>
-              </a:solidFill>
-              <a:highlight>
-                <a:srgbClr val="FFFFFF"/>
-              </a:highlight>
-              <a:latin typeface="Consolas" panose="020B0609020204030204" pitchFamily="49" charset="0"/>
-            </a:endParaRPr>
-          </a:p>
-          <a:p>
-            <a:r>
-              <a:rPr lang="en-GB" sz="1600" b="1" dirty="0">
-                <a:solidFill>
-                  <a:srgbClr val="000000"/>
-                </a:solidFill>
-                <a:highlight>
-                  <a:srgbClr val="FFFFFF"/>
-                </a:highlight>
-                <a:latin typeface="Consolas" panose="020B0609020204030204" pitchFamily="49" charset="0"/>
-              </a:rPr>
-              <a:t>    </a:t>
-            </a:r>
-            <a:r>
-              <a:rPr lang="en-GB" sz="1600" b="1" dirty="0">
-                <a:solidFill>
-                  <a:srgbClr val="0000FF"/>
-                </a:solidFill>
-                <a:highlight>
-                  <a:srgbClr val="FFFFFF"/>
-                </a:highlight>
-                <a:latin typeface="Consolas" panose="020B0609020204030204" pitchFamily="49" charset="0"/>
-              </a:rPr>
-              <a:t>&lt;</a:t>
-            </a:r>
-            <a:r>
-              <a:rPr lang="en-GB" sz="1600" b="1" dirty="0">
-                <a:solidFill>
-                  <a:srgbClr val="800000"/>
-                </a:solidFill>
-                <a:highlight>
-                  <a:srgbClr val="FFFFFF"/>
-                </a:highlight>
-                <a:latin typeface="Consolas" panose="020B0609020204030204" pitchFamily="49" charset="0"/>
-              </a:rPr>
-              <a:t>div</a:t>
-            </a:r>
-            <a:r>
-              <a:rPr lang="en-GB" sz="1600" b="1" dirty="0">
-                <a:solidFill>
-                  <a:srgbClr val="000000"/>
-                </a:solidFill>
-                <a:highlight>
-                  <a:srgbClr val="FFFFFF"/>
-                </a:highlight>
-                <a:latin typeface="Consolas" panose="020B0609020204030204" pitchFamily="49" charset="0"/>
-              </a:rPr>
-              <a:t> </a:t>
-            </a:r>
-            <a:r>
-              <a:rPr lang="en-GB" sz="1600" b="1" dirty="0">
-                <a:solidFill>
-                  <a:srgbClr val="FF0000"/>
-                </a:solidFill>
-                <a:highlight>
-                  <a:srgbClr val="FFFFFF"/>
-                </a:highlight>
-                <a:latin typeface="Consolas" panose="020B0609020204030204" pitchFamily="49" charset="0"/>
-              </a:rPr>
-              <a:t>id</a:t>
-            </a:r>
-            <a:r>
-              <a:rPr lang="en-GB" sz="1600" b="1" dirty="0">
-                <a:solidFill>
-                  <a:srgbClr val="0000FF"/>
-                </a:solidFill>
-                <a:highlight>
-                  <a:srgbClr val="FFFFFF"/>
-                </a:highlight>
-                <a:latin typeface="Consolas" panose="020B0609020204030204" pitchFamily="49" charset="0"/>
-              </a:rPr>
-              <a:t>="div1"&gt;</a:t>
-            </a:r>
-            <a:r>
-              <a:rPr lang="en-GB" sz="1600" b="1" dirty="0">
-                <a:solidFill>
-                  <a:srgbClr val="000000"/>
-                </a:solidFill>
-                <a:highlight>
-                  <a:srgbClr val="FFFFFF"/>
-                </a:highlight>
-                <a:latin typeface="Consolas" panose="020B0609020204030204" pitchFamily="49" charset="0"/>
-              </a:rPr>
-              <a:t>Welcome</a:t>
-            </a:r>
-            <a:r>
-              <a:rPr lang="en-GB" sz="1600" b="1" dirty="0">
-                <a:solidFill>
-                  <a:srgbClr val="0000FF"/>
-                </a:solidFill>
-                <a:highlight>
-                  <a:srgbClr val="FFFFFF"/>
-                </a:highlight>
-                <a:latin typeface="Consolas" panose="020B0609020204030204" pitchFamily="49" charset="0"/>
-              </a:rPr>
-              <a:t>&lt;/</a:t>
-            </a:r>
-            <a:r>
-              <a:rPr lang="en-GB" sz="1600" b="1" dirty="0">
-                <a:solidFill>
-                  <a:srgbClr val="800000"/>
-                </a:solidFill>
-                <a:highlight>
-                  <a:srgbClr val="FFFFFF"/>
-                </a:highlight>
-                <a:latin typeface="Consolas" panose="020B0609020204030204" pitchFamily="49" charset="0"/>
-              </a:rPr>
-              <a:t>div</a:t>
-            </a:r>
-            <a:r>
-              <a:rPr lang="en-GB" sz="1600" b="1" dirty="0">
-                <a:solidFill>
-                  <a:srgbClr val="0000FF"/>
-                </a:solidFill>
-                <a:highlight>
-                  <a:srgbClr val="FFFFFF"/>
-                </a:highlight>
-                <a:latin typeface="Consolas" panose="020B0609020204030204" pitchFamily="49" charset="0"/>
-              </a:rPr>
-              <a:t>&gt;</a:t>
-            </a:r>
-          </a:p>
-          <a:p>
-            <a:r>
-              <a:rPr lang="en-GB" sz="1600" b="1" dirty="0">
-                <a:solidFill>
-                  <a:srgbClr val="0000FF"/>
-                </a:solidFill>
-                <a:highlight>
-                  <a:srgbClr val="FFFFFF"/>
-                </a:highlight>
-                <a:latin typeface="Consolas" panose="020B0609020204030204" pitchFamily="49" charset="0"/>
-              </a:rPr>
-              <a:t>&lt;/</a:t>
-            </a:r>
-            <a:r>
-              <a:rPr lang="en-GB" sz="1600" b="1" dirty="0">
-                <a:solidFill>
-                  <a:srgbClr val="800000"/>
-                </a:solidFill>
-                <a:highlight>
-                  <a:srgbClr val="FFFFFF"/>
-                </a:highlight>
-                <a:latin typeface="Consolas" panose="020B0609020204030204" pitchFamily="49" charset="0"/>
-              </a:rPr>
-              <a:t>body</a:t>
-            </a:r>
-            <a:r>
-              <a:rPr lang="en-GB" sz="1600" b="1" dirty="0">
-                <a:solidFill>
-                  <a:srgbClr val="0000FF"/>
-                </a:solidFill>
-                <a:highlight>
-                  <a:srgbClr val="FFFFFF"/>
-                </a:highlight>
-                <a:latin typeface="Consolas" panose="020B0609020204030204" pitchFamily="49" charset="0"/>
-              </a:rPr>
-              <a:t>&gt;</a:t>
-            </a:r>
-            <a:endParaRPr lang="en-GB" sz="1600" b="1" dirty="0">
-              <a:solidFill>
-                <a:srgbClr val="000000"/>
-              </a:solidFill>
-              <a:highlight>
-                <a:srgbClr val="FFFFFF"/>
-              </a:highlight>
-              <a:latin typeface="Consolas" panose="020B0609020204030204" pitchFamily="49" charset="0"/>
-            </a:endParaRPr>
+            <a:endParaRPr lang="en-GB" sz="2000" b="1" dirty="0"/>
           </a:p>
         </p:txBody>
       </p:sp>
@@ -31486,11 +31953,26 @@
           <a:prstGeom prst="rect">
             <a:avLst/>
           </a:prstGeom>
+          <a:solidFill>
+            <a:schemeClr val="accent5">
+              <a:lumMod val="20000"/>
+              <a:lumOff val="80000"/>
+            </a:schemeClr>
+          </a:solidFill>
           <a:ln w="25400">
             <a:solidFill>
-              <a:srgbClr val="004050"/>
+              <a:schemeClr val="bg1">
+                <a:lumMod val="95000"/>
+              </a:schemeClr>
             </a:solidFill>
           </a:ln>
+          <a:effectLst>
+            <a:outerShdw blurRad="50800" dist="38100" algn="l" rotWithShape="0">
+              <a:prstClr val="black">
+                <a:alpha val="40000"/>
+              </a:prstClr>
+            </a:outerShdw>
+          </a:effectLst>
         </p:spPr>
         <p:txBody>
           <a:bodyPr wrap="square">
@@ -32205,17 +32687,32 @@
         </p:nvSpPr>
         <p:spPr>
           <a:xfrm>
-            <a:off x="801460" y="1417212"/>
-            <a:ext cx="10409034" cy="4278094"/>
+            <a:off x="676275" y="1417212"/>
+            <a:ext cx="10839449" cy="5139869"/>
           </a:xfrm>
           <a:prstGeom prst="rect">
             <a:avLst/>
           </a:prstGeom>
+          <a:solidFill>
+            <a:schemeClr val="accent5">
+              <a:lumMod val="20000"/>
+              <a:lumOff val="80000"/>
+            </a:schemeClr>
+          </a:solidFill>
           <a:ln w="25400">
             <a:solidFill>
-              <a:srgbClr val="004050"/>
+              <a:schemeClr val="bg1">
+                <a:lumMod val="95000"/>
+              </a:schemeClr>
             </a:solidFill>
           </a:ln>
+          <a:effectLst>
+            <a:outerShdw blurRad="50800" dist="38100" algn="l" rotWithShape="0">
+              <a:prstClr val="black">
+                <a:alpha val="40000"/>
+              </a:prstClr>
+            </a:outerShdw>
+          </a:effectLst>
         </p:spPr>
         <p:txBody>
           <a:bodyPr wrap="square">
@@ -32321,7 +32818,7 @@
               <a:t> </a:t>
             </a:r>
             <a:r>
-              <a:rPr lang="en-GB" sz="1600" b="1" dirty="0" err="1">
+              <a:rPr lang="en-GB" sz="1600" b="1" dirty="0">
                 <a:solidFill>
                   <a:srgbClr val="FF0000"/>
                 </a:solidFill>
@@ -32336,25 +32833,7 @@
                 </a:solidFill>
                 <a:latin typeface="Consolas" panose="020B0609020204030204" pitchFamily="49" charset="0"/>
               </a:rPr>
-              <a:t>="https://code.jquery.com</a:t>
-            </a:r>
-            <a:r>
-              <a:rPr lang="en-GB" sz="1600" b="1">
-                <a:solidFill>
-                  <a:srgbClr val="0000FF"/>
-                </a:solidFill>
-                <a:latin typeface="Consolas" panose="020B0609020204030204" pitchFamily="49" charset="0"/>
-              </a:rPr>
-              <a:t>/jquery-3.7.1</a:t>
-            </a:r>
-            <a:r>
-              <a:rPr lang="en-GB" sz="1600" b="1" dirty="0">
-                <a:solidFill>
-                  <a:srgbClr val="0000FF"/>
-                </a:solidFill>
-                <a:latin typeface="Consolas" panose="020B0609020204030204" pitchFamily="49" charset="0"/>
-              </a:rPr>
-              <a:t>.min.js"&gt;&lt;/</a:t>
+              <a:t>="https://code.jquery.com/jquery-3.7.1.min.js"&gt;&lt;/</a:t>
             </a:r>
             <a:r>
               <a:rPr lang="en-GB" sz="1600" b="1" dirty="0">
@@ -32417,6 +32896,11 @@
             </a:endParaRPr>
           </a:p>
           <a:p>
+            <a:pPr>
+              <a:lnSpc>
+                <a:spcPct val="150000"/>
+              </a:lnSpc>
+            </a:pPr>
             <a:r>
               <a:rPr lang="en-GB" sz="1600" b="1" dirty="0">
                 <a:solidFill>
@@ -32446,6 +32930,11 @@
             </a:r>
           </a:p>
           <a:p>
+            <a:pPr>
+              <a:lnSpc>
+                <a:spcPct val="150000"/>
+              </a:lnSpc>
+            </a:pPr>
             <a:r>
               <a:rPr lang="en-GB" sz="1600" b="1" dirty="0">
                 <a:solidFill>
@@ -32511,6 +33000,11 @@
             </a:r>
           </a:p>
           <a:p>
+            <a:pPr>
+              <a:lnSpc>
+                <a:spcPct val="150000"/>
+              </a:lnSpc>
+            </a:pPr>
             <a:r>
               <a:rPr lang="en-GB" sz="1600" b="1" dirty="0">
                 <a:solidFill>
@@ -32576,6 +33070,11 @@
             </a:r>
           </a:p>
           <a:p>
+            <a:pPr>
+              <a:lnSpc>
+                <a:spcPct val="150000"/>
+              </a:lnSpc>
+            </a:pPr>
             <a:r>
               <a:rPr lang="en-GB" sz="1600" b="1" dirty="0">
                 <a:solidFill>
@@ -32641,6 +33140,11 @@
             </a:r>
           </a:p>
           <a:p>
+            <a:pPr>
+              <a:lnSpc>
+                <a:spcPct val="150000"/>
+              </a:lnSpc>
+            </a:pPr>
             <a:r>
               <a:rPr lang="en-GB" sz="1600" b="1" dirty="0">
                 <a:solidFill>
@@ -32670,6 +33174,11 @@
             </a:r>
           </a:p>
           <a:p>
+            <a:pPr>
+              <a:lnSpc>
+                <a:spcPct val="150000"/>
+              </a:lnSpc>
+            </a:pPr>
             <a:r>
               <a:rPr lang="en-GB" sz="1600" b="1" dirty="0">
                 <a:solidFill>
@@ -32681,6 +33190,11 @@
             </a:r>
           </a:p>
           <a:p>
+            <a:pPr>
+              <a:lnSpc>
+                <a:spcPct val="150000"/>
+              </a:lnSpc>
+            </a:pPr>
             <a:r>
               <a:rPr lang="en-GB" sz="1600" b="1" dirty="0">
                 <a:solidFill>
@@ -35335,27 +35849,6 @@
 </file>
 
 <file path=customXml/item1.xml><?xml version="1.0" encoding="utf-8"?>
-<p:properties xmlns:p="http://schemas.microsoft.com/office/2006/metadata/properties" xmlns:xsi="http://www.w3.org/2001/XMLSchema-instance" xmlns:pc="http://schemas.microsoft.com/office/infopath/2007/PartnerControls">
-  <documentManagement>
-    <BookTypeField0 xmlns="B42EA499-AA80-4ED5-9ED5-37A17D3EB549">
-      <Terms xmlns="http://schemas.microsoft.com/office/infopath/2007/PartnerControls"/>
-    </BookTypeField0>
-    <IsBuildFile xmlns="B42EA499-AA80-4ED5-9ED5-37A17D3EB549" xsi:nil="true"/>
-    <SequenceNumber xmlns="B42EA499-AA80-4ED5-9ED5-37A17D3EB549" xsi:nil="true"/>
-  </documentManagement>
-</p:properties>
-</file>
-
-<file path=customXml/item2.xml><?xml version="1.0" encoding="utf-8"?>
-<?mso-contentType ?>
-<FormTemplates xmlns="http://schemas.microsoft.com/sharepoint/v3/contenttype/forms">
-  <Display>DocumentLibraryForm</Display>
-  <Edit>DocumentLibraryForm</Edit>
-  <New>DocumentLibraryForm</New>
-</FormTemplates>
-</file>
-
-<file path=customXml/item3.xml><?xml version="1.0" encoding="utf-8"?>
 <ct:contentTypeSchema xmlns:ct="http://schemas.microsoft.com/office/2006/metadata/contentType" xmlns:ma="http://schemas.microsoft.com/office/2006/metadata/properties/metaAttributes" ct:_="" ma:_="" ma:contentTypeName="Courseware" ma:contentTypeID="0x010100F0967B7CEE8D417F966757887D9466FB005CB7CECC996A5B448C70C3215DE65491" ma:contentTypeVersion="0" ma:contentTypeDescription="Base content type which represents courseware documents" ma:contentTypeScope="" ma:versionID="633ed7bf8a9769dc10b8af609c2e65e8">
   <xsd:schema xmlns:xsd="http://www.w3.org/2001/XMLSchema" xmlns:xs="http://www.w3.org/2001/XMLSchema" xmlns:p="http://schemas.microsoft.com/office/2006/metadata/properties" xmlns:ns2="B42EA499-AA80-4ED5-9ED5-37A17D3EB549" targetNamespace="http://schemas.microsoft.com/office/2006/metadata/properties" ma:root="true" ma:fieldsID="6641bdc0935a9ffdc34b1682c1e0febc" ns2:_="">
     <xsd:import namespace="B42EA499-AA80-4ED5-9ED5-37A17D3EB549"/>
@@ -35495,25 +35988,28 @@
 </ct:contentTypeSchema>
 </file>
 
-<file path=customXml/itemProps1.xml><?xml version="1.0" encoding="utf-8"?>
-<ds:datastoreItem xmlns:ds="http://schemas.openxmlformats.org/officeDocument/2006/customXml" ds:itemID="{31AFDEE6-0DD0-4552-9763-2F1314FC5107}">
-  <ds:schemaRefs>
-    <ds:schemaRef ds:uri="http://schemas.microsoft.com/office/2006/metadata/properties"/>
-    <ds:schemaRef ds:uri="http://schemas.microsoft.com/office/infopath/2007/PartnerControls"/>
-    <ds:schemaRef ds:uri="B42EA499-AA80-4ED5-9ED5-37A17D3EB549"/>
-  </ds:schemaRefs>
-</ds:datastoreItem>
+<file path=customXml/item2.xml><?xml version="1.0" encoding="utf-8"?>
+<?mso-contentType ?>
+<FormTemplates xmlns="http://schemas.microsoft.com/sharepoint/v3/contenttype/forms">
+  <Display>DocumentLibraryForm</Display>
+  <Edit>DocumentLibraryForm</Edit>
+  <New>DocumentLibraryForm</New>
+</FormTemplates>
 </file>
 
-<file path=customXml/itemProps2.xml><?xml version="1.0" encoding="utf-8"?>
-<ds:datastoreItem xmlns:ds="http://schemas.openxmlformats.org/officeDocument/2006/customXml" ds:itemID="{D989BA19-25A7-4EE5-94FF-35763DB61D64}">
-  <ds:schemaRefs>
-    <ds:schemaRef ds:uri="http://schemas.microsoft.com/sharepoint/v3/contenttype/forms"/>
-  </ds:schemaRefs>
-</ds:datastoreItem>
+<file path=customXml/item3.xml><?xml version="1.0" encoding="utf-8"?>
+<p:properties xmlns:p="http://schemas.microsoft.com/office/2006/metadata/properties" xmlns:xsi="http://www.w3.org/2001/XMLSchema-instance" xmlns:pc="http://schemas.microsoft.com/office/infopath/2007/PartnerControls">
+  <documentManagement>
+    <BookTypeField0 xmlns="B42EA499-AA80-4ED5-9ED5-37A17D3EB549">
+      <Terms xmlns="http://schemas.microsoft.com/office/infopath/2007/PartnerControls"/>
+    </BookTypeField0>
+    <IsBuildFile xmlns="B42EA499-AA80-4ED5-9ED5-37A17D3EB549" xsi:nil="true"/>
+    <SequenceNumber xmlns="B42EA499-AA80-4ED5-9ED5-37A17D3EB549" xsi:nil="true"/>
+  </documentManagement>
+</p:properties>
 </file>
 
-<file path=customXml/itemProps3.xml><?xml version="1.0" encoding="utf-8"?>
+<file path=customXml/itemProps1.xml><?xml version="1.0" encoding="utf-8"?>
 <ds:datastoreItem xmlns:ds="http://schemas.openxmlformats.org/officeDocument/2006/customXml" ds:itemID="{54095CE9-ECF8-453B-A3BA-394EBCA5637B}">
   <ds:schemaRefs>
     <ds:schemaRef ds:uri="http://schemas.microsoft.com/office/2006/metadata/contentType"/>
@@ -35529,4 +36025,22 @@
     <ds:schemaRef ds:uri="http://schemas.microsoft.com/internal/obd"/>
   </ds:schemaRefs>
 </ds:datastoreItem>
+</file>
+
+<file path=customXml/itemProps2.xml><?xml version="1.0" encoding="utf-8"?>
+<ds:datastoreItem xmlns:ds="http://schemas.openxmlformats.org/officeDocument/2006/customXml" ds:itemID="{D989BA19-25A7-4EE5-94FF-35763DB61D64}">
+  <ds:schemaRefs>
+    <ds:schemaRef ds:uri="http://schemas.microsoft.com/sharepoint/v3/contenttype/forms"/>
+  </ds:schemaRefs>
+</ds:datastoreItem>
+</file>
+
+<file path=customXml/itemProps3.xml><?xml version="1.0" encoding="utf-8"?>
+<ds:datastoreItem xmlns:ds="http://schemas.openxmlformats.org/officeDocument/2006/customXml" ds:itemID="{31AFDEE6-0DD0-4552-9763-2F1314FC5107}">
+  <ds:schemaRefs>
+    <ds:schemaRef ds:uri="http://schemas.microsoft.com/office/2006/metadata/properties"/>
+    <ds:schemaRef ds:uri="http://schemas.microsoft.com/office/infopath/2007/PartnerControls"/>
+    <ds:schemaRef ds:uri="B42EA499-AA80-4ED5-9ED5-37A17D3EB549"/>
+  </ds:schemaRefs>
+</ds:datastoreItem>
 </file>